--- a/Workshop Docs/Eustella/Digitalna radionica  Novi način timskog pisanja za znanost i projekte.pptx
+++ b/Workshop Docs/Eustella/Digitalna radionica  Novi način timskog pisanja za znanost i projekte.pptx
@@ -5582,7 +5582,51 @@
                 <a:ea typeface="Inter" pitchFamily="34" charset="-122"/>
                 <a:cs typeface="Inter" pitchFamily="34" charset="-120"/>
               </a:rPr>
-              <a:t>Vaš repozitorij postaje strukturirana baza znanja spremna za vašeg privatnog AI asistenta.</a:t>
+              <a:t>Vaš repozitorij postaje strukturirana baza znanja spremna za </a:t>
+            </a:r>
+            <a:r>
+              <a:rPr lang="en-US" sz="850" dirty="0" err="1">
+                <a:solidFill>
+                  <a:srgbClr val="495057"/>
+                </a:solidFill>
+                <a:latin typeface="Inter" pitchFamily="34" charset="0"/>
+                <a:ea typeface="Inter" pitchFamily="34" charset="-122"/>
+                <a:cs typeface="Inter" pitchFamily="34" charset="-120"/>
+              </a:rPr>
+              <a:t>vašeg</a:t>
+            </a:r>
+            <a:r>
+              <a:rPr lang="en-US" sz="850" dirty="0">
+                <a:solidFill>
+                  <a:srgbClr val="495057"/>
+                </a:solidFill>
+                <a:latin typeface="Inter" pitchFamily="34" charset="0"/>
+                <a:ea typeface="Inter" pitchFamily="34" charset="-122"/>
+                <a:cs typeface="Inter" pitchFamily="34" charset="-120"/>
+              </a:rPr>
+              <a:t> </a:t>
+            </a:r>
+            <a:r>
+              <a:rPr lang="en-US" sz="850" dirty="0" err="1">
+                <a:solidFill>
+                  <a:srgbClr val="495057"/>
+                </a:solidFill>
+                <a:latin typeface="Inter" pitchFamily="34" charset="0"/>
+                <a:ea typeface="Inter" pitchFamily="34" charset="-122"/>
+                <a:cs typeface="Inter" pitchFamily="34" charset="-120"/>
+              </a:rPr>
+              <a:t>privatnog</a:t>
+            </a:r>
+            <a:r>
+              <a:rPr lang="en-US" sz="850" dirty="0">
+                <a:solidFill>
+                  <a:srgbClr val="495057"/>
+                </a:solidFill>
+                <a:latin typeface="Inter" pitchFamily="34" charset="0"/>
+                <a:ea typeface="Inter" pitchFamily="34" charset="-122"/>
+                <a:cs typeface="Inter" pitchFamily="34" charset="-120"/>
+              </a:rPr>
+              <a:t> AI asistenta.</a:t>
             </a:r>
             <a:endParaRPr lang="en-US" sz="850" dirty="0"/>
           </a:p>
@@ -5662,7 +5706,7 @@
         <p:spPr>
           <a:xfrm>
             <a:off x="5036344" y="3905120"/>
-            <a:ext cx="3686175" cy="320018"/>
+            <a:ext cx="3686175" cy="285206"/>
           </a:xfrm>
           <a:prstGeom prst="rect">
             <a:avLst/>
@@ -5691,7 +5735,62 @@
                 <a:ea typeface="Inter" pitchFamily="34" charset="-122"/>
                 <a:cs typeface="Inter" pitchFamily="34" charset="-120"/>
               </a:rPr>
-              <a:t>Automatizirano sažimanje, prevođenje i generiranje složenih tablica iz običnog teksta.</a:t>
+              <a:t>Automatizirano sažimanje, prevođenje i generiranje složenih tablica </a:t>
+            </a:r>
+            <a:r>
+              <a:rPr lang="en-US" sz="850" dirty="0" err="1">
+                <a:solidFill>
+                  <a:srgbClr val="495057"/>
+                </a:solidFill>
+                <a:latin typeface="Inter" pitchFamily="34" charset="0"/>
+                <a:ea typeface="Inter" pitchFamily="34" charset="-122"/>
+                <a:cs typeface="Inter" pitchFamily="34" charset="-120"/>
+              </a:rPr>
+              <a:t>iz</a:t>
+            </a:r>
+            <a:r>
+              <a:rPr lang="en-US" sz="850" dirty="0">
+                <a:solidFill>
+                  <a:srgbClr val="495057"/>
+                </a:solidFill>
+                <a:latin typeface="Inter" pitchFamily="34" charset="0"/>
+                <a:ea typeface="Inter" pitchFamily="34" charset="-122"/>
+                <a:cs typeface="Inter" pitchFamily="34" charset="-120"/>
+              </a:rPr>
+              <a:t> </a:t>
+            </a:r>
+            <a:r>
+              <a:rPr lang="en-US" sz="850" dirty="0" err="1">
+                <a:solidFill>
+                  <a:srgbClr val="495057"/>
+                </a:solidFill>
+                <a:latin typeface="Inter" pitchFamily="34" charset="0"/>
+                <a:ea typeface="Inter" pitchFamily="34" charset="-122"/>
+                <a:cs typeface="Inter" pitchFamily="34" charset="-120"/>
+              </a:rPr>
+              <a:t>obično</a:t>
+            </a:r>
+            <a:r>
+              <a:rPr lang="hr-HR" sz="850" dirty="0">
+                <a:solidFill>
+                  <a:srgbClr val="495057"/>
+                </a:solidFill>
+                <a:latin typeface="Inter" pitchFamily="34" charset="0"/>
+                <a:ea typeface="Inter" pitchFamily="34" charset="-122"/>
+                <a:cs typeface="Inter" pitchFamily="34" charset="-120"/>
+              </a:rPr>
+              <a:t>g</a:t>
+            </a:r>
+            <a:r>
+              <a:rPr lang="en-US" sz="850" dirty="0">
+                <a:solidFill>
+                  <a:srgbClr val="495057"/>
+                </a:solidFill>
+                <a:latin typeface="Inter" pitchFamily="34" charset="0"/>
+                <a:ea typeface="Inter" pitchFamily="34" charset="-122"/>
+                <a:cs typeface="Inter" pitchFamily="34" charset="-120"/>
+              </a:rPr>
+              <a:t> teksta.</a:t>
             </a:r>
             <a:endParaRPr lang="en-US" sz="850" dirty="0"/>
           </a:p>
